--- a/report/docs-slides_final/Legal_RAG_Slides.pptx
+++ b/report/docs-slides_final/Legal_RAG_Slides.pptx
@@ -11549,40 +11549,7 @@
                 <a:ea typeface="Calibri" pitchFamily="34" charset="-122"/>
                 <a:cs typeface="Calibri" pitchFamily="34" charset="-120"/>
               </a:rPr>
-              <a:t>• Best faithfulness </a:t>
-            </a:r>
-            <a:r>
-              <a:rPr lang="en-US" sz="950">
-                <a:solidFill>
-                  <a:srgbClr val="0D1B2A"/>
-                </a:solidFill>
-                <a:latin typeface="Calibri" pitchFamily="34" charset="0"/>
-                <a:ea typeface="Calibri" pitchFamily="34" charset="-122"/>
-                <a:cs typeface="Calibri" pitchFamily="34" charset="-120"/>
-              </a:rPr>
-              <a:t>(0.775</a:t>
-            </a:r>
-            <a:r>
-              <a:rPr lang="en-US" sz="950" dirty="0">
-                <a:solidFill>
-                  <a:srgbClr val="0D1B2A"/>
-                </a:solidFill>
-                <a:latin typeface="Calibri" pitchFamily="34" charset="0"/>
-                <a:ea typeface="Calibri" pitchFamily="34" charset="-122"/>
-                <a:cs typeface="Calibri" pitchFamily="34" charset="-120"/>
-              </a:rPr>
-              <a:t>) + relevancy </a:t>
-            </a:r>
-            <a:r>
-              <a:rPr lang="en-US" sz="950">
-                <a:solidFill>
-                  <a:srgbClr val="0D1B2A"/>
-                </a:solidFill>
-                <a:latin typeface="Calibri" pitchFamily="34" charset="0"/>
-                <a:ea typeface="Calibri" pitchFamily="34" charset="-122"/>
-                <a:cs typeface="Calibri" pitchFamily="34" charset="-120"/>
-              </a:rPr>
-              <a:t>(0.821)</a:t>
+              <a:t>• Best faithfulness (0.775) + relevancy (0.821)</a:t>
             </a:r>
             <a:endParaRPr lang="en-US" sz="950" dirty="0"/>
           </a:p>
@@ -12683,21 +12650,18 @@
           <a:bodyPr wrap="square" lIns="0" tIns="0" rIns="0" bIns="0" rtlCol="0" anchor="ctr"/>
           <a:lstStyle/>
           <a:p>
-            <a:pPr marL="0" indent="0">
-              <a:buNone/>
-            </a:pPr>
             <a:r>
               <a:rPr lang="en-US" sz="1100" b="1" dirty="0">
                 <a:solidFill>
-                  <a:srgbClr val="FFFFFF"/>
-                </a:solidFill>
-                <a:latin typeface="Calibri" pitchFamily="34" charset="0"/>
-                <a:ea typeface="Calibri" pitchFamily="34" charset="-122"/>
-                <a:cs typeface="Calibri" pitchFamily="34" charset="-120"/>
-              </a:rPr>
-              <a:t>0.754</a:t>
-            </a:r>
-            <a:endParaRPr lang="en-US" sz="1100" dirty="0"/>
+                  <a:srgbClr val="0D1B2A"/>
+                </a:solidFill>
+                <a:latin typeface="Calibri" pitchFamily="34" charset="0"/>
+                <a:ea typeface="Calibri" pitchFamily="34" charset="-122"/>
+                <a:cs typeface="Calibri" pitchFamily="34" charset="-120"/>
+              </a:rPr>
+              <a:t>0.766</a:t>
+            </a:r>
+            <a:endParaRPr lang="en-US" sz="1100" b="1" dirty="0"/>
           </a:p>
         </p:txBody>
       </p:sp>
